--- a/assets/pptx/catalog-229.pptx
+++ b/assets/pptx/catalog-229.pptx
@@ -3252,7 +3252,7 @@
                 <a:ea typeface="Ebrima"/>
                 <a:cs typeface="Ebrima"/>
               </a:rPr>
-              <a:t>አላማሩም ወይ ዛሬ አላማሩም ወይ (2x)</a:t>
+              <a:t>አላማሩም ወይ ዛሬ አላማሩም ወይ 2x</a:t>
             </a:r>
           </a:p>
           <a:p>
@@ -3391,7 +3391,7 @@
                 <a:ea typeface="Ebrima"/>
                 <a:cs typeface="Ebrima"/>
               </a:rPr>
-              <a:t>ቃል የገቡት ቤተሰቦቹ (3x)</a:t>
+              <a:t>ቃል የገቡት ቤተሰቦቹ 3x</a:t>
             </a:r>
           </a:p>
           <a:p>
@@ -3409,7 +3409,7 @@
                 <a:ea typeface="Ebrima"/>
                 <a:cs typeface="Ebrima"/>
               </a:rPr>
-              <a:t>ከሁሉም ሚበልጥ አግኝቷል እጁ (3x)</a:t>
+              <a:t>ከሁሉም ሚበልጥ አግኝቷል እጁ 3x</a:t>
             </a:r>
           </a:p>
           <a:p>
@@ -3427,7 +3427,7 @@
                 <a:ea typeface="Ebrima"/>
                 <a:cs typeface="Ebrima"/>
               </a:rPr>
-              <a:t>ቃል የገቧት ቤተሰቦቿ (3x)</a:t>
+              <a:t>ቃል የገቧት ቤተሰቦቿ 3x</a:t>
             </a:r>
           </a:p>
           <a:p>
@@ -3445,7 +3445,7 @@
                 <a:ea typeface="Ebrima"/>
                 <a:cs typeface="Ebrima"/>
               </a:rPr>
-              <a:t>ወሰነች ልትኖር ከባሏ ብቻ (3x)</a:t>
+              <a:t>ወሰነች ልትኖር ከባሏ ብቻ 3x</a:t>
             </a:r>
           </a:p>
         </p:txBody>
@@ -3584,7 +3584,7 @@
                 <a:ea typeface="Ebrima"/>
                 <a:cs typeface="Ebrima"/>
               </a:rPr>
-              <a:t>አመስግኑ (ኦሆ) አጨብጭቡ (አሃ)</a:t>
+              <a:t>አመስግኑ ኦሆ አጨብጭቡ አሃ</a:t>
             </a:r>
           </a:p>
           <a:p>
@@ -3602,7 +3602,7 @@
                 <a:ea typeface="Ebrima"/>
                 <a:cs typeface="Ebrima"/>
               </a:rPr>
-              <a:t>ለአምላካችሁ (ኦሆ) እልል በሉ (አሃ) (2x)</a:t>
+              <a:t>ለአምላካችሁ ኦሆ እልል በሉ አሃ 2x</a:t>
             </a:r>
           </a:p>
         </p:txBody>
@@ -3759,7 +3759,7 @@
                 <a:ea typeface="Ebrima"/>
                 <a:cs typeface="Ebrima"/>
               </a:rPr>
-              <a:t>አብሬ ጭብጨባን ጨምሬ (2x)</a:t>
+              <a:t>አብሬ ጭብጨባን ጨምሬ 2x</a:t>
             </a:r>
           </a:p>
         </p:txBody>
@@ -3916,7 +3916,7 @@
                 <a:ea typeface="Ebrima"/>
                 <a:cs typeface="Ebrima"/>
               </a:rPr>
-              <a:t>አብሬ ጭብጨባን ጨምሬ (2x)</a:t>
+              <a:t>አብሬ ጭብጨባን ጨምሬ 2x</a:t>
             </a:r>
           </a:p>
         </p:txBody>
@@ -3983,7 +3983,7 @@
                 <a:ea typeface="Ebrima"/>
                 <a:cs typeface="Ebrima"/>
               </a:rPr>
-              <a:t>አላማሩም ወይ ዛሬ አላማሩም ወይ (2x)</a:t>
+              <a:t>አላማሩም ወይ ዛሬ አላማሩም ወይ 2x</a:t>
             </a:r>
           </a:p>
           <a:p>
@@ -4001,7 +4001,7 @@
                 <a:ea typeface="Ebrima"/>
                 <a:cs typeface="Ebrima"/>
               </a:rPr>
-              <a:t>እውነት የሆናቸው ጌታ አይደለም ወይ (2x)</a:t>
+              <a:t>እውነት የሆናቸው ጌታ አይደለም ወይ 2x</a:t>
             </a:r>
           </a:p>
           <a:p>
@@ -4019,7 +4019,7 @@
                 <a:ea typeface="Ebrima"/>
                 <a:cs typeface="Ebrima"/>
               </a:rPr>
-              <a:t>ሞገስ የሆናቸው ኢየሱስ አይደለም ወይ (2x)</a:t>
+              <a:t>ሞገስ የሆናቸው ኢየሱስ አይደለም ወይ 2x</a:t>
             </a:r>
           </a:p>
         </p:txBody>
@@ -4086,7 +4086,7 @@
                 <a:ea typeface="Ebrima"/>
                 <a:cs typeface="Ebrima"/>
               </a:rPr>
-              <a:t>አላማሩም ወይ ዛሬ አላማሩም ወይ (2x)</a:t>
+              <a:t>አላማሩም ወይ ዛሬ አላማሩም ወይ 2x</a:t>
             </a:r>
           </a:p>
           <a:p>
@@ -4225,7 +4225,7 @@
                 <a:ea typeface="Ebrima"/>
                 <a:cs typeface="Ebrima"/>
               </a:rPr>
-              <a:t>ቃል የገቡት ቤተሰቦቹ (3x)</a:t>
+              <a:t>ቃል የገቡት ቤተሰቦቹ 3x</a:t>
             </a:r>
           </a:p>
           <a:p>
@@ -4243,7 +4243,7 @@
                 <a:ea typeface="Ebrima"/>
                 <a:cs typeface="Ebrima"/>
               </a:rPr>
-              <a:t>ከሁሉም ሚበልጥ አግኝቷል እጁ (3x)</a:t>
+              <a:t>ከሁሉም ሚበልጥ አግኝቷል እጁ 3x</a:t>
             </a:r>
           </a:p>
           <a:p>
@@ -4261,7 +4261,7 @@
                 <a:ea typeface="Ebrima"/>
                 <a:cs typeface="Ebrima"/>
               </a:rPr>
-              <a:t>ቃል የገቧት ቤተሰቦቿ (3x)</a:t>
+              <a:t>ቃል የገቧት ቤተሰቦቿ 3x</a:t>
             </a:r>
           </a:p>
           <a:p>
@@ -4279,7 +4279,7 @@
                 <a:ea typeface="Ebrima"/>
                 <a:cs typeface="Ebrima"/>
               </a:rPr>
-              <a:t>ወሰነች ልትኖር ከባሏ ብቻ (3x)</a:t>
+              <a:t>ወሰነች ልትኖር ከባሏ ብቻ 3x</a:t>
             </a:r>
           </a:p>
         </p:txBody>
@@ -4418,7 +4418,7 @@
                 <a:ea typeface="Ebrima"/>
                 <a:cs typeface="Ebrima"/>
               </a:rPr>
-              <a:t>አመስግኑ (ኦሆ) አጨብጭቡ (አሃ)</a:t>
+              <a:t>አመስግኑ ኦሆ አጨብጭቡ አሃ</a:t>
             </a:r>
           </a:p>
           <a:p>
@@ -4436,7 +4436,7 @@
                 <a:ea typeface="Ebrima"/>
                 <a:cs typeface="Ebrima"/>
               </a:rPr>
-              <a:t>ለአምላካችሁ (ኦሆ) እልል በሉ (አሃ) (2x)</a:t>
+              <a:t>ለአምላካችሁ ኦሆ እልል በሉ አሃ 2x</a:t>
             </a:r>
           </a:p>
         </p:txBody>
@@ -4593,7 +4593,7 @@
                 <a:ea typeface="Ebrima"/>
                 <a:cs typeface="Ebrima"/>
               </a:rPr>
-              <a:t>አብሬ ጭብጨባን ጨምሬ (2x)</a:t>
+              <a:t>አብሬ ጭብጨባን ጨምሬ 2x</a:t>
             </a:r>
           </a:p>
         </p:txBody>
@@ -4660,7 +4660,7 @@
                 <a:ea typeface="Ebrima"/>
                 <a:cs typeface="Ebrima"/>
               </a:rPr>
-              <a:t>ከመጀመሪያው (3x)</a:t>
+              <a:t>ከመጀመሪያው 3x</a:t>
             </a:r>
           </a:p>
           <a:p>
@@ -4678,7 +4678,7 @@
                 <a:ea typeface="Ebrima"/>
                 <a:cs typeface="Ebrima"/>
               </a:rPr>
-              <a:t>እግዚአብሔር አንድን ወንድ ለአንድ ሴት አድርጐ ሰራው (4x)</a:t>
+              <a:t>እግዚአብሔር አንድን ወንድ ለአንድ ሴት አድርጐ ሰራው 4x</a:t>
             </a:r>
           </a:p>
           <a:p>
@@ -4696,7 +4696,7 @@
                 <a:ea typeface="Ebrima"/>
                 <a:cs typeface="Ebrima"/>
               </a:rPr>
-              <a:t>ከመጀመሪያው (3x)</a:t>
+              <a:t>ከመጀመሪያው 3x</a:t>
             </a:r>
           </a:p>
           <a:p>
@@ -4714,7 +4714,7 @@
                 <a:ea typeface="Ebrima"/>
                 <a:cs typeface="Ebrima"/>
               </a:rPr>
-              <a:t>እግዚአብሔር አንድን ሴት ለአንድ ወንድ አድርጐ ሰራት (4x)</a:t>
+              <a:t>እግዚአብሔር አንድን ሴት ለአንድ ወንድ አድርጐ ሰራት 4x</a:t>
             </a:r>
           </a:p>
           <a:p>
@@ -4732,7 +4732,7 @@
                 <a:ea typeface="Ebrima"/>
                 <a:cs typeface="Ebrima"/>
               </a:rPr>
-              <a:t>ይህ ነው የእግዚአብሔር ፈቃድ ዛሬም ይህ ነው (4x)</a:t>
+              <a:t>ይህ ነው የእግዚአብሔር ፈቃድ ዛሬም ይህ ነው 4x</a:t>
             </a:r>
           </a:p>
           <a:p>
@@ -4750,7 +4750,7 @@
                 <a:ea typeface="Ebrima"/>
                 <a:cs typeface="Ebrima"/>
               </a:rPr>
-              <a:t>ይህ ነው የእግዚአብሔር ፈቃድ ዛሬም ይህ ነው (4x)</a:t>
+              <a:t>ይህ ነው የእግዚአብሔር ፈቃድ ዛሬም ይህ ነው 4x</a:t>
             </a:r>
           </a:p>
         </p:txBody>
@@ -4817,7 +4817,7 @@
                 <a:ea typeface="Ebrima"/>
                 <a:cs typeface="Ebrima"/>
               </a:rPr>
-              <a:t>አላማሩም ወይ ዛሬ አላማሩም ወይ (2x)</a:t>
+              <a:t>አላማሩም ወይ ዛሬ አላማሩም ወይ 2x</a:t>
             </a:r>
           </a:p>
           <a:p>
